--- a/presentation/submission/260916_AI활용_업무지침네비게이터_4차 수정.pptx
+++ b/presentation/submission/260916_AI활용_업무지침네비게이터_4차 수정.pptx
@@ -11706,24 +11706,24 @@
               </a:spcBef>
             </a:pPr>
             <a:r>
-              <a:rPr lang="ko-KR" altLang="en-US" sz="1300" spc="-60">
+              <a:rPr lang="ko-KR" altLang="en-US" sz="1300" spc="-40">
                 <a:latin typeface="+mn-ea"/>
               </a:rPr>
               <a:t>핵심 키워드 사전</a:t>
             </a:r>
             <a:r>
-              <a:rPr lang="en-US" altLang="ko-KR" sz="1300" spc="-60">
+              <a:rPr lang="en-US" altLang="ko-KR" sz="1300" spc="-40">
                 <a:latin typeface="+mn-ea"/>
               </a:rPr>
               <a:t> · </a:t>
             </a:r>
             <a:r>
-              <a:rPr lang="ko-KR" altLang="en-US" sz="1300" spc="-60">
+              <a:rPr lang="ko-KR" altLang="en-US" sz="1300" spc="-40">
                 <a:latin typeface="+mn-ea"/>
               </a:rPr>
               <a:t>임계값 2가지 원인</a:t>
             </a:r>
-            <a:endParaRPr lang="en-US" altLang="ko-KR" sz="1300" spc="-60">
+            <a:endParaRPr lang="en-US" altLang="ko-KR" sz="1300" spc="-40">
               <a:latin typeface="+mn-ea"/>
             </a:endParaRPr>
           </a:p>
@@ -11734,7 +11734,7 @@
               </a:spcBef>
             </a:pPr>
             <a:r>
-              <a:rPr lang="en-US" altLang="ko-KR" sz="1300">
+              <a:rPr lang="en-US" altLang="ko-KR" sz="1300" spc="-40">
                 <a:latin typeface="+mn-ea"/>
               </a:rPr>
               <a:t> </a:t>
@@ -11743,15 +11743,9 @@
               <a:rPr lang="ko-KR" altLang="en-US" sz="1300" spc="-40">
                 <a:latin typeface="+mn-ea"/>
               </a:rPr>
-              <a:t>→</a:t>
-            </a:r>
-            <a:r>
-              <a:rPr lang="ko-KR" altLang="en-US" sz="1300" spc="-60">
-                <a:latin typeface="+mn-ea"/>
-              </a:rPr>
-              <a:t> 유사도 점수로 진단</a:t>
-            </a:r>
-            <a:endParaRPr lang="ko-KR" altLang="en-US" sz="1300" spc="-60">
+              <a:t>→ 유사도 점수로 진단</a:t>
+            </a:r>
+            <a:endParaRPr lang="ko-KR" altLang="en-US" sz="1300" spc="-40">
               <a:solidFill>
                 <a:schemeClr val="bg1">
                   <a:lumMod val="75000"/>
@@ -12928,7 +12922,7 @@
         </p:blipFill>
         <p:spPr>
           <a:xfrm>
-            <a:off x="3504519" y="4965968"/>
+            <a:off x="3504519" y="4934795"/>
             <a:ext cx="329184" cy="329184"/>
           </a:xfrm>
           <a:prstGeom prst="rect">

--- a/presentation/submission/260916_AI활용_업무지침네비게이터_4차 수정.pptx
+++ b/presentation/submission/260916_AI활용_업무지침네비게이터_4차 수정.pptx
@@ -10,9 +10,9 @@
   <p:sldIdLst>
     <p:sldId id="256" r:id="rId2"/>
     <p:sldId id="263" r:id="rId3"/>
-    <p:sldId id="269" r:id="rId4"/>
-    <p:sldId id="276" r:id="rId5"/>
-    <p:sldId id="273" r:id="rId6"/>
+    <p:sldId id="278" r:id="rId4"/>
+    <p:sldId id="279" r:id="rId5"/>
+    <p:sldId id="280" r:id="rId6"/>
     <p:sldId id="274" r:id="rId7"/>
   </p:sldIdLst>
   <p:sldSz cx="9906000" cy="6858000" type="A4"/>
@@ -3822,7 +3822,7 @@
         </p:nvSpPr>
         <p:spPr>
           <a:xfrm>
-            <a:off x="7283733" y="5147722"/>
+            <a:off x="7252560" y="5147722"/>
             <a:ext cx="2386148" cy="478467"/>
           </a:xfrm>
           <a:prstGeom prst="roundRect">
@@ -4604,7 +4604,7 @@
         </p:nvSpPr>
         <p:spPr>
           <a:xfrm>
-            <a:off x="462512" y="5147722"/>
+            <a:off x="431339" y="5147722"/>
             <a:ext cx="2252113" cy="478467"/>
           </a:xfrm>
           <a:prstGeom prst="roundRect">
@@ -4650,7 +4650,7 @@
         </p:nvSpPr>
         <p:spPr>
           <a:xfrm>
-            <a:off x="469592" y="4971163"/>
+            <a:off x="438419" y="4971163"/>
             <a:ext cx="647700" cy="228600"/>
           </a:xfrm>
           <a:prstGeom prst="roundRect">
@@ -4714,7 +4714,7 @@
         </p:nvSpPr>
         <p:spPr>
           <a:xfrm>
-            <a:off x="2893719" y="5147722"/>
+            <a:off x="2862546" y="5147722"/>
             <a:ext cx="4192537" cy="478467"/>
           </a:xfrm>
           <a:prstGeom prst="roundRect">
@@ -4738,19 +4738,29 @@
           <a:p>
             <a:r>
               <a:rPr lang="ko-KR" altLang="en-US" sz="1400" b="1"/>
-              <a:t>             키워드</a:t>
+              <a:t>               키워드 </a:t>
+            </a:r>
+            <a:r>
+              <a:rPr lang="ko-KR" altLang="en-US" sz="1400" b="1">
+                <a:latin typeface="맑은 고딕" panose="020B0503020000020004" pitchFamily="50" charset="-127"/>
+                <a:ea typeface="맑은 고딕" panose="020B0503020000020004" pitchFamily="50" charset="-127"/>
+              </a:rPr>
+              <a:t>〮 </a:t>
+            </a:r>
+            <a:r>
+              <a:rPr lang="ko-KR" altLang="en-US" sz="1400" b="1"/>
+              <a:t>유형 분석              절차</a:t>
             </a:r>
             <a:r>
               <a:rPr lang="en-US" altLang="ko-KR" sz="1400" b="1"/>
-              <a:t>, </a:t>
-            </a:r>
-            <a:r>
-              <a:rPr lang="ko-KR" altLang="en-US" sz="1400" b="1"/>
-              <a:t>업무 유형 분석            절차</a:t>
-            </a:r>
-            <a:r>
-              <a:rPr lang="en-US" altLang="ko-KR" sz="1400" b="1"/>
-              <a:t>, </a:t>
+              <a:t> </a:t>
+            </a:r>
+            <a:r>
+              <a:rPr lang="ko-KR" altLang="en-US" sz="1400" b="1">
+                <a:latin typeface="맑은 고딕" panose="020B0503020000020004" pitchFamily="50" charset="-127"/>
+                <a:ea typeface="맑은 고딕" panose="020B0503020000020004" pitchFamily="50" charset="-127"/>
+              </a:rPr>
+              <a:t>〮 </a:t>
             </a:r>
             <a:r>
               <a:rPr lang="ko-KR" altLang="en-US" sz="1400" b="1"/>
@@ -4778,7 +4788,7 @@
         </p:nvSpPr>
         <p:spPr>
           <a:xfrm>
-            <a:off x="2893719" y="4971163"/>
+            <a:off x="2862546" y="4971163"/>
             <a:ext cx="647700" cy="228600"/>
           </a:xfrm>
           <a:prstGeom prst="roundRect">
@@ -4847,7 +4857,7 @@
         </p:blipFill>
         <p:spPr>
           <a:xfrm>
-            <a:off x="7332478" y="5175960"/>
+            <a:off x="7301305" y="5175960"/>
             <a:ext cx="525332" cy="443544"/>
           </a:xfrm>
           <a:prstGeom prst="rect">
@@ -4886,7 +4896,7 @@
         </p:blipFill>
         <p:spPr>
           <a:xfrm>
-            <a:off x="494664" y="5101671"/>
+            <a:off x="463491" y="5101671"/>
             <a:ext cx="597557" cy="597557"/>
           </a:xfrm>
           <a:prstGeom prst="rect">
@@ -4925,7 +4935,7 @@
         </p:blipFill>
         <p:spPr>
           <a:xfrm>
-            <a:off x="5294639" y="5167171"/>
+            <a:off x="5076431" y="5167171"/>
             <a:ext cx="425550" cy="425550"/>
           </a:xfrm>
           <a:prstGeom prst="rect">
@@ -4964,7 +4974,7 @@
         </p:blipFill>
         <p:spPr>
           <a:xfrm>
-            <a:off x="3004795" y="5196056"/>
+            <a:off x="2973622" y="5196056"/>
             <a:ext cx="425550" cy="425550"/>
           </a:xfrm>
           <a:prstGeom prst="rect">
@@ -4986,7 +4996,7 @@
         </p:nvSpPr>
         <p:spPr>
           <a:xfrm>
-            <a:off x="7283733" y="4971163"/>
+            <a:off x="7252560" y="4971163"/>
             <a:ext cx="647700" cy="228600"/>
           </a:xfrm>
           <a:prstGeom prst="roundRect">
@@ -5307,7 +5317,7 @@
         </p:nvSpPr>
         <p:spPr>
           <a:xfrm rot="5400000">
-            <a:off x="2730899" y="5328339"/>
+            <a:off x="2699726" y="5328339"/>
             <a:ext cx="166088" cy="120792"/>
           </a:xfrm>
           <a:prstGeom prst="triangle">
@@ -5361,7 +5371,7 @@
         </p:nvSpPr>
         <p:spPr>
           <a:xfrm rot="5400000">
-            <a:off x="7103619" y="5330017"/>
+            <a:off x="7072446" y="5330017"/>
             <a:ext cx="166088" cy="120792"/>
           </a:xfrm>
           <a:prstGeom prst="triangle">
@@ -5902,7 +5912,7 @@
             </a:pPr>
             <a:r>
               <a:rPr lang="ko-KR" altLang="en-US" sz="1300"/>
-              <a:t> 일관된 결과물 확보</a:t>
+              <a:t> 일관된 결과물 확보 필요</a:t>
             </a:r>
           </a:p>
         </p:txBody>
@@ -8194,13 +8204,7 @@
           <p:cNvGraphicFramePr>
             <a:graphicFrameLocks noGrp="1"/>
           </p:cNvGraphicFramePr>
-          <p:nvPr>
-            <p:extLst>
-              <p:ext uri="{D42A27DB-BD31-4B8C-83A1-F6EECF244321}">
-                <p14:modId xmlns:p14="http://schemas.microsoft.com/office/powerpoint/2010/main" val="346601325"/>
-              </p:ext>
-            </p:extLst>
-          </p:nvPr>
+          <p:nvPr/>
         </p:nvGraphicFramePr>
         <p:xfrm>
           <a:off x="300351" y="4143587"/>
@@ -10748,7 +10752,7 @@
     </p:spTree>
     <p:extLst>
       <p:ext uri="{BB962C8B-B14F-4D97-AF65-F5344CB8AC3E}">
-        <p14:creationId xmlns:p14="http://schemas.microsoft.com/office/powerpoint/2010/main" val="3556033760"/>
+        <p14:creationId xmlns:p14="http://schemas.microsoft.com/office/powerpoint/2010/main" val="1258906867"/>
       </p:ext>
     </p:extLst>
   </p:cSld>
@@ -10895,6 +10899,15 @@
               <a:t>. </a:t>
             </a:r>
             <a:r>
+              <a:rPr lang="ko-KR" altLang="en-US" sz="2000" b="1" spc="-100">
+                <a:solidFill>
+                  <a:prstClr val="black"/>
+                </a:solidFill>
+                <a:latin typeface="+mn-ea"/>
+              </a:rPr>
+              <a:t>신규 </a:t>
+            </a:r>
+            <a:r>
               <a:rPr kumimoji="0" lang="ko-KR" altLang="en-US" sz="2000" b="1" i="0" u="none" strike="noStrike" kern="1200" cap="none" spc="-100" normalizeH="0" baseline="0" noProof="0">
                 <a:ln>
                   <a:noFill/>
@@ -10908,7 +10921,7 @@
                 <a:latin typeface="+mn-ea"/>
                 <a:cs typeface="+mn-cs"/>
               </a:rPr>
-              <a:t>설비 신규구매 매칭 오류 발견과 보완 검증 </a:t>
+              <a:t>설비 구매 매칭 오류 발견과 보완 검증 </a:t>
             </a:r>
             <a:endParaRPr kumimoji="0" lang="ko-KR" altLang="en-US" sz="2000" b="1" i="0" u="none" strike="noStrike" kern="1200" cap="none" spc="-100" normalizeH="0" baseline="0" noProof="0" dirty="0">
               <a:ln>
@@ -11602,7 +11615,7 @@
         </p:nvSpPr>
         <p:spPr>
           <a:xfrm>
-            <a:off x="862949" y="4634376"/>
+            <a:off x="862949" y="4623985"/>
             <a:ext cx="2168971" cy="307777"/>
           </a:xfrm>
           <a:prstGeom prst="rect">
@@ -11820,7 +11833,7 @@
         </p:nvSpPr>
         <p:spPr>
           <a:xfrm>
-            <a:off x="4062908" y="4634376"/>
+            <a:off x="4062908" y="4623985"/>
             <a:ext cx="1854286" cy="307776"/>
           </a:xfrm>
           <a:prstGeom prst="rect">
@@ -11858,7 +11871,7 @@
         </p:nvSpPr>
         <p:spPr>
           <a:xfrm>
-            <a:off x="6803192" y="4634376"/>
+            <a:off x="6803192" y="4623985"/>
             <a:ext cx="2391888" cy="307776"/>
           </a:xfrm>
           <a:prstGeom prst="rect">
@@ -13644,7 +13657,7 @@
     </p:spTree>
     <p:extLst>
       <p:ext uri="{BB962C8B-B14F-4D97-AF65-F5344CB8AC3E}">
-        <p14:creationId xmlns:p14="http://schemas.microsoft.com/office/powerpoint/2010/main" val="1260616487"/>
+        <p14:creationId xmlns:p14="http://schemas.microsoft.com/office/powerpoint/2010/main" val="1251127355"/>
       </p:ext>
     </p:extLst>
   </p:cSld>
@@ -13986,12 +13999,12 @@
           </a:fontRef>
         </p:style>
         <p:txBody>
-          <a:bodyPr rtlCol="0" anchor="ctr"/>
+          <a:bodyPr lIns="0" rIns="0" rtlCol="0" anchor="ctr"/>
           <a:lstStyle/>
           <a:p>
             <a:pPr algn="ctr"/>
             <a:r>
-              <a:rPr lang="en-US" altLang="ko-KR" sz="1500" b="1">
+              <a:rPr lang="en-US" altLang="ko-KR" sz="1500" b="1" spc="-40">
                 <a:solidFill>
                   <a:schemeClr val="bg1"/>
                 </a:solidFill>
@@ -14000,13 +14013,31 @@
               <a:t>2.</a:t>
             </a:r>
             <a:r>
-              <a:rPr lang="ko-KR" altLang="en-US" sz="1500" b="1">
+              <a:rPr lang="ko-KR" altLang="en-US" sz="1500" b="1" spc="-40">
                 <a:solidFill>
                   <a:schemeClr val="bg1"/>
                 </a:solidFill>
                 <a:latin typeface="+mn-ea"/>
               </a:rPr>
-              <a:t>절차〮부서 확인</a:t>
+              <a:t>절차</a:t>
+            </a:r>
+            <a:r>
+              <a:rPr lang="en-US" altLang="ko-KR" sz="1500" b="1" spc="-40">
+                <a:solidFill>
+                  <a:schemeClr val="bg1"/>
+                </a:solidFill>
+                <a:latin typeface="+mn-ea"/>
+              </a:rPr>
+              <a:t>/</a:t>
+            </a:r>
+            <a:r>
+              <a:rPr lang="ko-KR" altLang="en-US" sz="1500" b="1" spc="-40">
+                <a:solidFill>
+                  <a:schemeClr val="bg1"/>
+                </a:solidFill>
+                <a:latin typeface="+mn-ea"/>
+              </a:rPr>
+              <a:t>부서 확인</a:t>
             </a:r>
           </a:p>
         </p:txBody>
@@ -14577,7 +14608,7 @@
         </p:nvSpPr>
         <p:spPr>
           <a:xfrm>
-            <a:off x="862949" y="4405774"/>
+            <a:off x="862949" y="4384992"/>
             <a:ext cx="2168971" cy="307777"/>
           </a:xfrm>
           <a:prstGeom prst="rect">
@@ -14771,7 +14802,7 @@
         </p:nvSpPr>
         <p:spPr>
           <a:xfrm>
-            <a:off x="4062908" y="4405774"/>
+            <a:off x="4062908" y="4384992"/>
             <a:ext cx="1854286" cy="307776"/>
           </a:xfrm>
           <a:prstGeom prst="rect">
@@ -14815,7 +14846,7 @@
         </p:nvSpPr>
         <p:spPr>
           <a:xfrm>
-            <a:off x="6803192" y="4405774"/>
+            <a:off x="6803192" y="4384992"/>
             <a:ext cx="2391888" cy="307776"/>
           </a:xfrm>
           <a:prstGeom prst="rect">
@@ -15440,7 +15471,7 @@
         <p:spPr>
           <a:xfrm>
             <a:off x="417123" y="1271745"/>
-            <a:ext cx="3709182" cy="2136473"/>
+            <a:ext cx="3645785" cy="2136473"/>
           </a:xfrm>
           <a:prstGeom prst="roundRect">
             <a:avLst>
@@ -16247,7 +16278,7 @@
     </p:spTree>
     <p:extLst>
       <p:ext uri="{BB962C8B-B14F-4D97-AF65-F5344CB8AC3E}">
-        <p14:creationId xmlns:p14="http://schemas.microsoft.com/office/powerpoint/2010/main" val="2261681522"/>
+        <p14:creationId xmlns:p14="http://schemas.microsoft.com/office/powerpoint/2010/main" val="3296015526"/>
       </p:ext>
     </p:extLst>
   </p:cSld>
@@ -16418,7 +16449,7 @@
         </p:nvSpPr>
         <p:spPr>
           <a:xfrm>
-            <a:off x="556286" y="3731541"/>
+            <a:off x="556286" y="3970534"/>
             <a:ext cx="9034370" cy="406475"/>
           </a:xfrm>
           <a:prstGeom prst="rect">
@@ -16513,7 +16544,7 @@
         </p:nvGrpSpPr>
         <p:grpSpPr>
           <a:xfrm>
-            <a:off x="310399" y="3841530"/>
+            <a:off x="310399" y="4080523"/>
             <a:ext cx="194324" cy="180020"/>
             <a:chOff x="416496" y="3577457"/>
             <a:chExt cx="194324" cy="180020"/>
@@ -16705,7 +16736,7 @@
         </p:nvSpPr>
         <p:spPr>
           <a:xfrm>
-            <a:off x="380299" y="6166245"/>
+            <a:off x="380299" y="6062335"/>
             <a:ext cx="9289581" cy="505290"/>
           </a:xfrm>
           <a:prstGeom prst="rect">
@@ -16809,7 +16840,7 @@
         </p:nvGrpSpPr>
         <p:grpSpPr>
           <a:xfrm>
-            <a:off x="388532" y="6203164"/>
+            <a:off x="388532" y="6099254"/>
             <a:ext cx="511817" cy="431452"/>
             <a:chOff x="-895525" y="3274733"/>
             <a:chExt cx="619300" cy="474597"/>
@@ -16941,7 +16972,7 @@
         </p:nvCxnSpPr>
         <p:spPr>
           <a:xfrm>
-            <a:off x="352511" y="4594363"/>
+            <a:off x="352511" y="4833356"/>
             <a:ext cx="9299601" cy="0"/>
           </a:xfrm>
           <a:prstGeom prst="line">
@@ -16984,7 +17015,7 @@
         </p:nvGrpSpPr>
         <p:grpSpPr>
           <a:xfrm>
-            <a:off x="362747" y="4239502"/>
+            <a:off x="362747" y="4478495"/>
             <a:ext cx="2783225" cy="307777"/>
             <a:chOff x="536919" y="4223182"/>
             <a:chExt cx="2783225" cy="307777"/>
@@ -17085,7 +17116,7 @@
         </p:nvGrpSpPr>
         <p:grpSpPr>
           <a:xfrm>
-            <a:off x="3312776" y="4239502"/>
+            <a:off x="3312776" y="4478495"/>
             <a:ext cx="2783225" cy="307777"/>
             <a:chOff x="536919" y="4223182"/>
             <a:chExt cx="2783225" cy="307777"/>
@@ -17186,7 +17217,7 @@
         </p:nvGrpSpPr>
         <p:grpSpPr>
           <a:xfrm>
-            <a:off x="6868887" y="4239502"/>
+            <a:off x="6868887" y="4478495"/>
             <a:ext cx="2783225" cy="307777"/>
             <a:chOff x="536919" y="4223182"/>
             <a:chExt cx="2783225" cy="307777"/>
@@ -17287,7 +17318,7 @@
         </p:nvSpPr>
         <p:spPr>
           <a:xfrm>
-            <a:off x="360341" y="4743373"/>
+            <a:off x="360341" y="4982366"/>
             <a:ext cx="2959800" cy="292388"/>
           </a:xfrm>
           <a:prstGeom prst="rect">
@@ -17347,7 +17378,7 @@
         </p:nvSpPr>
         <p:spPr>
           <a:xfrm>
-            <a:off x="360341" y="5175288"/>
+            <a:off x="360341" y="5413781"/>
             <a:ext cx="2959800" cy="292388"/>
           </a:xfrm>
           <a:prstGeom prst="rect">
@@ -17370,10 +17401,10 @@
       </p:sp>
       <p:sp>
         <p:nvSpPr>
-          <p:cNvPr id="89" name="TextBox 88">
+          <p:cNvPr id="90" name="TextBox 89">
             <a:extLst>
               <a:ext uri="{FF2B5EF4-FFF2-40B4-BE49-F238E27FC236}">
-                <a16:creationId xmlns:a16="http://schemas.microsoft.com/office/drawing/2014/main" id="{A4E941C6-F195-4AD3-A77C-CF50ED01D45B}"/>
+                <a16:creationId xmlns:a16="http://schemas.microsoft.com/office/drawing/2014/main" id="{773E6AF5-A624-43C8-947D-5EE5E92C333B}"/>
               </a:ext>
             </a:extLst>
           </p:cNvPr>
@@ -17382,43 +17413,8 @@
         </p:nvSpPr>
         <p:spPr>
           <a:xfrm>
-            <a:off x="360340" y="5621601"/>
-            <a:ext cx="3177515" cy="292388"/>
-          </a:xfrm>
-          <a:prstGeom prst="rect">
-            <a:avLst/>
-          </a:prstGeom>
-          <a:noFill/>
-        </p:spPr>
-        <p:txBody>
-          <a:bodyPr wrap="square" rtlCol="0">
-            <a:spAutoFit/>
-          </a:bodyPr>
-          <a:lstStyle/>
-          <a:p>
-            <a:r>
-              <a:rPr lang="ko-KR" altLang="en-US" sz="1300" spc="-40"/>
-              <a:t>검색 결과의 정확성과 화면 사용성 개선</a:t>
-            </a:r>
-          </a:p>
-        </p:txBody>
-      </p:sp>
-      <p:sp>
-        <p:nvSpPr>
-          <p:cNvPr id="90" name="TextBox 89">
-            <a:extLst>
-              <a:ext uri="{FF2B5EF4-FFF2-40B4-BE49-F238E27FC236}">
-                <a16:creationId xmlns:a16="http://schemas.microsoft.com/office/drawing/2014/main" id="{773E6AF5-A624-43C8-947D-5EE5E92C333B}"/>
-              </a:ext>
-            </a:extLst>
-          </p:cNvPr>
-          <p:cNvSpPr txBox="1"/>
-          <p:nvPr/>
-        </p:nvSpPr>
-        <p:spPr>
-          <a:xfrm>
-            <a:off x="3332140" y="4743373"/>
-            <a:ext cx="3631368" cy="292388"/>
+            <a:off x="3332140" y="4982366"/>
+            <a:ext cx="3253721" cy="292383"/>
           </a:xfrm>
           <a:prstGeom prst="rect">
             <a:avLst/>
@@ -17447,10 +17443,10 @@
       </p:sp>
       <p:sp>
         <p:nvSpPr>
-          <p:cNvPr id="91" name="TextBox 90">
+          <p:cNvPr id="92" name="TextBox 91">
             <a:extLst>
               <a:ext uri="{FF2B5EF4-FFF2-40B4-BE49-F238E27FC236}">
-                <a16:creationId xmlns:a16="http://schemas.microsoft.com/office/drawing/2014/main" id="{B3722681-AF6A-4617-8FFF-3A4DA9F3990E}"/>
+                <a16:creationId xmlns:a16="http://schemas.microsoft.com/office/drawing/2014/main" id="{3B9F7B80-E34E-4956-8D94-CD2B38F66EBB}"/>
               </a:ext>
             </a:extLst>
           </p:cNvPr>
@@ -17459,8 +17455,8 @@
         </p:nvSpPr>
         <p:spPr>
           <a:xfrm>
-            <a:off x="3332141" y="5175288"/>
-            <a:ext cx="3449660" cy="292388"/>
+            <a:off x="3332140" y="5413781"/>
+            <a:ext cx="3177515" cy="292388"/>
           </a:xfrm>
           <a:prstGeom prst="rect">
             <a:avLst/>
@@ -17475,17 +17471,17 @@
           <a:p>
             <a:r>
               <a:rPr lang="ko-KR" altLang="en-US" sz="1300" spc="-40"/>
-              <a:t>시범 대상 업무의 문서 및 용어 기준 정리</a:t>
-            </a:r>
-          </a:p>
-        </p:txBody>
-      </p:sp>
-      <p:sp>
-        <p:nvSpPr>
-          <p:cNvPr id="92" name="TextBox 91">
+              <a:t>사용자 의견 반영해 안내 방식 보완</a:t>
+            </a:r>
+          </a:p>
+        </p:txBody>
+      </p:sp>
+      <p:sp>
+        <p:nvSpPr>
+          <p:cNvPr id="93" name="TextBox 92">
             <a:extLst>
               <a:ext uri="{FF2B5EF4-FFF2-40B4-BE49-F238E27FC236}">
-                <a16:creationId xmlns:a16="http://schemas.microsoft.com/office/drawing/2014/main" id="{3B9F7B80-E34E-4956-8D94-CD2B38F66EBB}"/>
+                <a16:creationId xmlns:a16="http://schemas.microsoft.com/office/drawing/2014/main" id="{81FDD0D6-52C0-488E-A014-75F411499CFF}"/>
               </a:ext>
             </a:extLst>
           </p:cNvPr>
@@ -17494,42 +17490,7 @@
         </p:nvSpPr>
         <p:spPr>
           <a:xfrm>
-            <a:off x="3332140" y="5621601"/>
-            <a:ext cx="3177515" cy="292388"/>
-          </a:xfrm>
-          <a:prstGeom prst="rect">
-            <a:avLst/>
-          </a:prstGeom>
-          <a:noFill/>
-        </p:spPr>
-        <p:txBody>
-          <a:bodyPr wrap="square" rtlCol="0">
-            <a:spAutoFit/>
-          </a:bodyPr>
-          <a:lstStyle/>
-          <a:p>
-            <a:r>
-              <a:rPr lang="ko-KR" altLang="en-US" sz="1300" spc="-40"/>
-              <a:t>사용자 의견 반영해 안내 방식 보완</a:t>
-            </a:r>
-          </a:p>
-        </p:txBody>
-      </p:sp>
-      <p:sp>
-        <p:nvSpPr>
-          <p:cNvPr id="93" name="TextBox 92">
-            <a:extLst>
-              <a:ext uri="{FF2B5EF4-FFF2-40B4-BE49-F238E27FC236}">
-                <a16:creationId xmlns:a16="http://schemas.microsoft.com/office/drawing/2014/main" id="{81FDD0D6-52C0-488E-A014-75F411499CFF}"/>
-              </a:ext>
-            </a:extLst>
-          </p:cNvPr>
-          <p:cNvSpPr txBox="1"/>
-          <p:nvPr/>
-        </p:nvSpPr>
-        <p:spPr>
-          <a:xfrm>
-            <a:off x="6868887" y="4743373"/>
+            <a:off x="6868887" y="4982366"/>
             <a:ext cx="2670365" cy="292388"/>
           </a:xfrm>
           <a:prstGeom prst="rect">
@@ -17559,10 +17520,10 @@
       </p:sp>
       <p:sp>
         <p:nvSpPr>
-          <p:cNvPr id="94" name="TextBox 93">
+          <p:cNvPr id="95" name="TextBox 94">
             <a:extLst>
               <a:ext uri="{FF2B5EF4-FFF2-40B4-BE49-F238E27FC236}">
-                <a16:creationId xmlns:a16="http://schemas.microsoft.com/office/drawing/2014/main" id="{B16B1D5F-06A3-4A12-9C30-F1563EA41284}"/>
+                <a16:creationId xmlns:a16="http://schemas.microsoft.com/office/drawing/2014/main" id="{74780FFA-EC75-4D49-B7B4-9D6ABB2B0B10}"/>
               </a:ext>
             </a:extLst>
           </p:cNvPr>
@@ -17571,42 +17532,7 @@
         </p:nvSpPr>
         <p:spPr>
           <a:xfrm>
-            <a:off x="6868888" y="5175288"/>
-            <a:ext cx="2959800" cy="292388"/>
-          </a:xfrm>
-          <a:prstGeom prst="rect">
-            <a:avLst/>
-          </a:prstGeom>
-          <a:noFill/>
-        </p:spPr>
-        <p:txBody>
-          <a:bodyPr wrap="square" rtlCol="0">
-            <a:spAutoFit/>
-          </a:bodyPr>
-          <a:lstStyle/>
-          <a:p>
-            <a:r>
-              <a:rPr lang="ko-KR" altLang="en-US" sz="1300" spc="-40"/>
-              <a:t>데이터 관리 및 최신화 체계 검토</a:t>
-            </a:r>
-          </a:p>
-        </p:txBody>
-      </p:sp>
-      <p:sp>
-        <p:nvSpPr>
-          <p:cNvPr id="95" name="TextBox 94">
-            <a:extLst>
-              <a:ext uri="{FF2B5EF4-FFF2-40B4-BE49-F238E27FC236}">
-                <a16:creationId xmlns:a16="http://schemas.microsoft.com/office/drawing/2014/main" id="{74780FFA-EC75-4D49-B7B4-9D6ABB2B0B10}"/>
-              </a:ext>
-            </a:extLst>
-          </p:cNvPr>
-          <p:cNvSpPr txBox="1"/>
-          <p:nvPr/>
-        </p:nvSpPr>
-        <p:spPr>
-          <a:xfrm>
-            <a:off x="6868887" y="5621601"/>
+            <a:off x="6868887" y="5413781"/>
             <a:ext cx="3177515" cy="292388"/>
           </a:xfrm>
           <a:prstGeom prst="rect">
@@ -17861,8 +17787,8 @@
         </p:nvSpPr>
         <p:spPr>
           <a:xfrm>
-            <a:off x="321991" y="1712246"/>
-            <a:ext cx="4568663" cy="1618392"/>
+            <a:off x="321991" y="1878502"/>
+            <a:ext cx="4568663" cy="1338828"/>
           </a:xfrm>
           <a:prstGeom prst="rect">
             <a:avLst/>
@@ -17918,6 +17844,9 @@
               <a:spcBef>
                 <a:spcPts val="500"/>
               </a:spcBef>
+              <a:spcAft>
+                <a:spcPts val="500"/>
+              </a:spcAft>
               <a:buClr>
                 <a:schemeClr val="accent1">
                   <a:lumMod val="60000"/>
@@ -18012,6 +17941,15 @@
               </a:rPr>
               <a:t> </a:t>
             </a:r>
+            <a:r>
+              <a:rPr lang="ko-KR" altLang="en-US" sz="1400">
+                <a:latin typeface="+mn-ea"/>
+              </a:rPr>
+              <a:t>→ 실제 웹 서비스 구현에 활용</a:t>
+            </a:r>
+            <a:endParaRPr lang="en-US" altLang="ko-KR" sz="1400">
+              <a:latin typeface="+mn-ea"/>
+            </a:endParaRPr>
           </a:p>
           <a:p>
             <a:pPr marL="90488" indent="-90488">
@@ -18031,21 +17969,56 @@
               <a:buChar char="§"/>
             </a:pPr>
             <a:r>
+              <a:rPr lang="ko-KR" altLang="en-US" sz="1400">
+                <a:latin typeface="+mn-ea"/>
+              </a:rPr>
+              <a:t> 데이터와 검색 결과를 검증하며 </a:t>
+            </a:r>
+            <a:r>
               <a:rPr lang="en-US" altLang="ko-KR" sz="1400">
                 <a:latin typeface="+mn-ea"/>
               </a:rPr>
-              <a:t> </a:t>
+              <a:t>AI </a:t>
             </a:r>
             <a:r>
               <a:rPr lang="ko-KR" altLang="en-US" sz="1400">
                 <a:latin typeface="+mn-ea"/>
               </a:rPr>
-              <a:t>학습한 개념을 실제 웹 서비스 구현에 활용</a:t>
+              <a:t>구동방식 이해</a:t>
             </a:r>
             <a:endParaRPr lang="en-US" altLang="ko-KR" sz="1400">
               <a:latin typeface="+mn-ea"/>
             </a:endParaRPr>
           </a:p>
+        </p:txBody>
+      </p:sp>
+      <p:sp>
+        <p:nvSpPr>
+          <p:cNvPr id="41" name="TextBox 40">
+            <a:extLst>
+              <a:ext uri="{FF2B5EF4-FFF2-40B4-BE49-F238E27FC236}">
+                <a16:creationId xmlns:a16="http://schemas.microsoft.com/office/drawing/2014/main" id="{BFD8CBE9-531F-460A-A6C2-1F24271B5F97}"/>
+              </a:ext>
+            </a:extLst>
+          </p:cNvPr>
+          <p:cNvSpPr txBox="1"/>
+          <p:nvPr/>
+        </p:nvSpPr>
+        <p:spPr>
+          <a:xfrm>
+            <a:off x="5015346" y="1878502"/>
+            <a:ext cx="4568663" cy="1338828"/>
+          </a:xfrm>
+          <a:prstGeom prst="rect">
+            <a:avLst/>
+          </a:prstGeom>
+          <a:noFill/>
+        </p:spPr>
+        <p:txBody>
+          <a:bodyPr wrap="square" rtlCol="0">
+            <a:spAutoFit/>
+          </a:bodyPr>
+          <a:lstStyle/>
           <a:p>
             <a:pPr marL="90488" indent="-90488">
               <a:spcBef>
@@ -18064,62 +18037,39 @@
               <a:buChar char="§"/>
             </a:pPr>
             <a:r>
+              <a:rPr lang="ko-KR" altLang="en-US" sz="1400">
+                <a:latin typeface="+mn-ea"/>
+              </a:rPr>
+              <a:t> 회사 지침</a:t>
+            </a:r>
+            <a:r>
               <a:rPr lang="en-US" altLang="ko-KR" sz="1400">
                 <a:latin typeface="+mn-ea"/>
               </a:rPr>
-              <a:t> </a:t>
+              <a:t>, </a:t>
             </a:r>
             <a:r>
               <a:rPr lang="ko-KR" altLang="en-US" sz="1400">
                 <a:latin typeface="+mn-ea"/>
               </a:rPr>
-              <a:t>데이터와 검색 결과를 검증하며 </a:t>
+              <a:t>규정</a:t>
             </a:r>
             <a:r>
               <a:rPr lang="en-US" altLang="ko-KR" sz="1400">
                 <a:latin typeface="+mn-ea"/>
               </a:rPr>
-              <a:t>AI </a:t>
+              <a:t>, </a:t>
             </a:r>
             <a:r>
               <a:rPr lang="ko-KR" altLang="en-US" sz="1400">
                 <a:latin typeface="+mn-ea"/>
               </a:rPr>
-              <a:t>구동방식 이해</a:t>
+              <a:t>프로세스 데이터 추가 확보</a:t>
             </a:r>
             <a:endParaRPr lang="en-US" altLang="ko-KR" sz="1400">
               <a:latin typeface="+mn-ea"/>
             </a:endParaRPr>
           </a:p>
-        </p:txBody>
-      </p:sp>
-      <p:sp>
-        <p:nvSpPr>
-          <p:cNvPr id="41" name="TextBox 40">
-            <a:extLst>
-              <a:ext uri="{FF2B5EF4-FFF2-40B4-BE49-F238E27FC236}">
-                <a16:creationId xmlns:a16="http://schemas.microsoft.com/office/drawing/2014/main" id="{BFD8CBE9-531F-460A-A6C2-1F24271B5F97}"/>
-              </a:ext>
-            </a:extLst>
-          </p:cNvPr>
-          <p:cNvSpPr txBox="1"/>
-          <p:nvPr/>
-        </p:nvSpPr>
-        <p:spPr>
-          <a:xfrm>
-            <a:off x="5015346" y="1712246"/>
-            <a:ext cx="4568663" cy="1682512"/>
-          </a:xfrm>
-          <a:prstGeom prst="rect">
-            <a:avLst/>
-          </a:prstGeom>
-          <a:noFill/>
-        </p:spPr>
-        <p:txBody>
-          <a:bodyPr wrap="square" rtlCol="0">
-            <a:spAutoFit/>
-          </a:bodyPr>
-          <a:lstStyle/>
           <a:p>
             <a:pPr marL="90488" indent="-90488">
               <a:spcBef>
@@ -18138,34 +18088,16 @@
               <a:buChar char="§"/>
             </a:pPr>
             <a:r>
+              <a:rPr lang="en-US" altLang="ko-KR" sz="1400">
+                <a:latin typeface="+mn-ea"/>
+              </a:rPr>
+              <a:t> </a:t>
+            </a:r>
+            <a:r>
               <a:rPr lang="ko-KR" altLang="en-US" sz="1400">
                 <a:latin typeface="+mn-ea"/>
               </a:rPr>
-              <a:t> 회사 지침</a:t>
-            </a:r>
-            <a:r>
-              <a:rPr lang="en-US" altLang="ko-KR" sz="1400">
-                <a:latin typeface="+mn-ea"/>
-              </a:rPr>
-              <a:t>, </a:t>
-            </a:r>
-            <a:r>
-              <a:rPr lang="ko-KR" altLang="en-US" sz="1400">
-                <a:latin typeface="+mn-ea"/>
-              </a:rPr>
-              <a:t>규정</a:t>
-            </a:r>
-            <a:r>
-              <a:rPr lang="en-US" altLang="ko-KR" sz="1400">
-                <a:latin typeface="+mn-ea"/>
-              </a:rPr>
-              <a:t>, </a:t>
-            </a:r>
-            <a:r>
-              <a:rPr lang="ko-KR" altLang="en-US" sz="1400">
-                <a:latin typeface="+mn-ea"/>
-              </a:rPr>
-              <a:t>프로세스 데이터 추가 확보</a:t>
+              <a:t>실제 업무 데이터로 다양한 상황 검증</a:t>
             </a:r>
             <a:endParaRPr lang="en-US" altLang="ko-KR" sz="1400">
               <a:latin typeface="+mn-ea"/>
@@ -18192,79 +18124,13 @@
               <a:rPr lang="en-US" altLang="ko-KR" sz="1400">
                 <a:latin typeface="+mn-ea"/>
               </a:rPr>
-              <a:t> </a:t>
+              <a:t> RAGAS </a:t>
             </a:r>
             <a:r>
               <a:rPr lang="ko-KR" altLang="en-US" sz="1400">
                 <a:latin typeface="+mn-ea"/>
               </a:rPr>
-              <a:t>실제 업무 데이터 기반 검증</a:t>
-            </a:r>
-            <a:endParaRPr lang="en-US" altLang="ko-KR" sz="1400">
-              <a:latin typeface="+mn-ea"/>
-            </a:endParaRPr>
-          </a:p>
-          <a:p>
-            <a:pPr marL="90488" indent="-90488">
-              <a:spcBef>
-                <a:spcPts val="500"/>
-              </a:spcBef>
-              <a:spcAft>
-                <a:spcPts val="500"/>
-              </a:spcAft>
-              <a:buClr>
-                <a:schemeClr val="accent1">
-                  <a:lumMod val="60000"/>
-                  <a:lumOff val="40000"/>
-                </a:schemeClr>
-              </a:buClr>
-              <a:buFont typeface="Wingdings" panose="05000000000000000000" pitchFamily="2" charset="2"/>
-              <a:buChar char="§"/>
-            </a:pPr>
-            <a:r>
-              <a:rPr lang="en-US" altLang="ko-KR" sz="1400">
-                <a:latin typeface="+mn-ea"/>
-              </a:rPr>
-              <a:t> </a:t>
-            </a:r>
-            <a:r>
-              <a:rPr lang="ko-KR" altLang="en-US" sz="1400">
-                <a:latin typeface="+mn-ea"/>
-              </a:rPr>
-              <a:t>다양한 업무 상황에 대한 추천 정확성 확인</a:t>
-            </a:r>
-            <a:endParaRPr lang="en-US" altLang="ko-KR" sz="1400">
-              <a:latin typeface="+mn-ea"/>
-            </a:endParaRPr>
-          </a:p>
-          <a:p>
-            <a:pPr marL="90488" indent="-90488">
-              <a:spcBef>
-                <a:spcPts val="500"/>
-              </a:spcBef>
-              <a:spcAft>
-                <a:spcPts val="500"/>
-              </a:spcAft>
-              <a:buClr>
-                <a:schemeClr val="accent1">
-                  <a:lumMod val="60000"/>
-                  <a:lumOff val="40000"/>
-                </a:schemeClr>
-              </a:buClr>
-              <a:buFont typeface="Wingdings" panose="05000000000000000000" pitchFamily="2" charset="2"/>
-              <a:buChar char="§"/>
-            </a:pPr>
-            <a:r>
-              <a:rPr lang="en-US" altLang="ko-KR" sz="1400">
-                <a:latin typeface="+mn-ea"/>
-              </a:rPr>
-              <a:t> RAG</a:t>
-            </a:r>
-            <a:r>
-              <a:rPr lang="ko-KR" altLang="en-US" sz="1400">
-                <a:latin typeface="+mn-ea"/>
-              </a:rPr>
-              <a:t>와 검색 품질에 대한 추가 학습</a:t>
+              <a:t>등 검색 품질에 대한 추가 학습</a:t>
             </a:r>
             <a:endParaRPr lang="en-US" altLang="ko-KR" sz="1400">
               <a:latin typeface="+mn-ea"/>
